--- a/UNIUBE-MD/Slides/06 - Inferencia Logica.pptx
+++ b/UNIUBE-MD/Slides/06 - Inferencia Logica.pptx
@@ -204,7 +204,7 @@
           <a:p>
             <a:fld id="{6ED03497-8374-466E-85FA-95E1138D8F6E}" type="datetimeFigureOut">
               <a:rPr lang="pt-BR" smtClean="0"/>
-              <a:t>22/08/2026</a:t>
+              <a:t>23/08/2026</a:t>
             </a:fld>
             <a:endParaRPr lang="pt-BR"/>
           </a:p>
@@ -1447,7 +1447,7 @@
           <a:p>
             <a:fld id="{A87E3B6E-8316-4A1C-BADA-DB7F3456EEF1}" type="datetimeFigureOut">
               <a:rPr lang="pt-BR" smtClean="0"/>
-              <a:t>22/08/2026</a:t>
+              <a:t>23/08/2026</a:t>
             </a:fld>
             <a:endParaRPr lang="pt-BR"/>
           </a:p>
@@ -1645,7 +1645,7 @@
           <a:p>
             <a:fld id="{A87E3B6E-8316-4A1C-BADA-DB7F3456EEF1}" type="datetimeFigureOut">
               <a:rPr lang="pt-BR" smtClean="0"/>
-              <a:t>22/08/2026</a:t>
+              <a:t>23/08/2026</a:t>
             </a:fld>
             <a:endParaRPr lang="pt-BR"/>
           </a:p>
@@ -1853,7 +1853,7 @@
           <a:p>
             <a:fld id="{A87E3B6E-8316-4A1C-BADA-DB7F3456EEF1}" type="datetimeFigureOut">
               <a:rPr lang="pt-BR" smtClean="0"/>
-              <a:t>22/08/2026</a:t>
+              <a:t>23/08/2026</a:t>
             </a:fld>
             <a:endParaRPr lang="pt-BR"/>
           </a:p>
@@ -2089,7 +2089,7 @@
           <a:p>
             <a:fld id="{A87E3B6E-8316-4A1C-BADA-DB7F3456EEF1}" type="datetimeFigureOut">
               <a:rPr lang="pt-BR" smtClean="0"/>
-              <a:t>22/08/2026</a:t>
+              <a:t>23/08/2026</a:t>
             </a:fld>
             <a:endParaRPr lang="pt-BR"/>
           </a:p>
@@ -2259,7 +2259,7 @@
           <a:p>
             <a:fld id="{A87E3B6E-8316-4A1C-BADA-DB7F3456EEF1}" type="datetimeFigureOut">
               <a:rPr lang="pt-BR" smtClean="0"/>
-              <a:t>22/08/2026</a:t>
+              <a:t>23/08/2026</a:t>
             </a:fld>
             <a:endParaRPr lang="pt-BR"/>
           </a:p>
@@ -2527,7 +2527,7 @@
           <a:p>
             <a:fld id="{A87E3B6E-8316-4A1C-BADA-DB7F3456EEF1}" type="datetimeFigureOut">
               <a:rPr lang="pt-BR" smtClean="0"/>
-              <a:t>22/08/2026</a:t>
+              <a:t>23/08/2026</a:t>
             </a:fld>
             <a:endParaRPr lang="pt-BR"/>
           </a:p>
@@ -2759,7 +2759,7 @@
           <a:p>
             <a:fld id="{A87E3B6E-8316-4A1C-BADA-DB7F3456EEF1}" type="datetimeFigureOut">
               <a:rPr lang="pt-BR" smtClean="0"/>
-              <a:t>22/08/2026</a:t>
+              <a:t>23/08/2026</a:t>
             </a:fld>
             <a:endParaRPr lang="pt-BR"/>
           </a:p>
@@ -3114,7 +3114,7 @@
           <a:p>
             <a:fld id="{A87E3B6E-8316-4A1C-BADA-DB7F3456EEF1}" type="datetimeFigureOut">
               <a:rPr lang="pt-BR" smtClean="0"/>
-              <a:t>22/08/2026</a:t>
+              <a:t>23/08/2026</a:t>
             </a:fld>
             <a:endParaRPr lang="pt-BR"/>
           </a:p>
@@ -3255,7 +3255,7 @@
           <a:p>
             <a:fld id="{A87E3B6E-8316-4A1C-BADA-DB7F3456EEF1}" type="datetimeFigureOut">
               <a:rPr lang="pt-BR" smtClean="0"/>
-              <a:t>22/08/2026</a:t>
+              <a:t>23/08/2026</a:t>
             </a:fld>
             <a:endParaRPr lang="pt-BR"/>
           </a:p>
@@ -3350,7 +3350,7 @@
           <a:p>
             <a:fld id="{A87E3B6E-8316-4A1C-BADA-DB7F3456EEF1}" type="datetimeFigureOut">
               <a:rPr lang="pt-BR" smtClean="0"/>
-              <a:t>22/08/2026</a:t>
+              <a:t>23/08/2026</a:t>
             </a:fld>
             <a:endParaRPr lang="pt-BR"/>
           </a:p>
@@ -3714,7 +3714,7 @@
           <a:p>
             <a:fld id="{A87E3B6E-8316-4A1C-BADA-DB7F3456EEF1}" type="datetimeFigureOut">
               <a:rPr lang="pt-BR" smtClean="0"/>
-              <a:t>22/08/2026</a:t>
+              <a:t>23/08/2026</a:t>
             </a:fld>
             <a:endParaRPr lang="pt-BR"/>
           </a:p>
@@ -3915,7 +3915,7 @@
           <a:p>
             <a:fld id="{A87E3B6E-8316-4A1C-BADA-DB7F3456EEF1}" type="datetimeFigureOut">
               <a:rPr lang="pt-BR" smtClean="0"/>
-              <a:t>22/08/2026</a:t>
+              <a:t>23/08/2026</a:t>
             </a:fld>
             <a:endParaRPr lang="pt-BR"/>
           </a:p>
@@ -4275,7 +4275,7 @@
           <a:p>
             <a:fld id="{A87E3B6E-8316-4A1C-BADA-DB7F3456EEF1}" type="datetimeFigureOut">
               <a:rPr lang="pt-BR" smtClean="0"/>
-              <a:t>22/08/2026</a:t>
+              <a:t>23/08/2026</a:t>
             </a:fld>
             <a:endParaRPr lang="pt-BR"/>
           </a:p>
@@ -4460,7 +4460,7 @@
           <a:p>
             <a:fld id="{A87E3B6E-8316-4A1C-BADA-DB7F3456EEF1}" type="datetimeFigureOut">
               <a:rPr lang="pt-BR" smtClean="0"/>
-              <a:t>22/08/2026</a:t>
+              <a:t>23/08/2026</a:t>
             </a:fld>
             <a:endParaRPr lang="pt-BR"/>
           </a:p>
@@ -4640,7 +4640,7 @@
           <a:p>
             <a:fld id="{A87E3B6E-8316-4A1C-BADA-DB7F3456EEF1}" type="datetimeFigureOut">
               <a:rPr lang="pt-BR" smtClean="0"/>
-              <a:t>22/08/2026</a:t>
+              <a:t>23/08/2026</a:t>
             </a:fld>
             <a:endParaRPr lang="pt-BR"/>
           </a:p>
@@ -4903,7 +4903,7 @@
           <a:p>
             <a:fld id="{A87E3B6E-8316-4A1C-BADA-DB7F3456EEF1}" type="datetimeFigureOut">
               <a:rPr lang="pt-BR" smtClean="0"/>
-              <a:t>22/08/2026</a:t>
+              <a:t>23/08/2026</a:t>
             </a:fld>
             <a:endParaRPr lang="pt-BR"/>
           </a:p>
@@ -5168,7 +5168,7 @@
           <a:p>
             <a:fld id="{A87E3B6E-8316-4A1C-BADA-DB7F3456EEF1}" type="datetimeFigureOut">
               <a:rPr lang="pt-BR" smtClean="0"/>
-              <a:t>22/08/2026</a:t>
+              <a:t>23/08/2026</a:t>
             </a:fld>
             <a:endParaRPr lang="pt-BR"/>
           </a:p>
@@ -5580,7 +5580,7 @@
           <a:p>
             <a:fld id="{A87E3B6E-8316-4A1C-BADA-DB7F3456EEF1}" type="datetimeFigureOut">
               <a:rPr lang="pt-BR" smtClean="0"/>
-              <a:t>22/08/2026</a:t>
+              <a:t>23/08/2026</a:t>
             </a:fld>
             <a:endParaRPr lang="pt-BR"/>
           </a:p>
@@ -5721,7 +5721,7 @@
           <a:p>
             <a:fld id="{A87E3B6E-8316-4A1C-BADA-DB7F3456EEF1}" type="datetimeFigureOut">
               <a:rPr lang="pt-BR" smtClean="0"/>
-              <a:t>22/08/2026</a:t>
+              <a:t>23/08/2026</a:t>
             </a:fld>
             <a:endParaRPr lang="pt-BR"/>
           </a:p>
@@ -5834,7 +5834,7 @@
           <a:p>
             <a:fld id="{A87E3B6E-8316-4A1C-BADA-DB7F3456EEF1}" type="datetimeFigureOut">
               <a:rPr lang="pt-BR" smtClean="0"/>
-              <a:t>22/08/2026</a:t>
+              <a:t>23/08/2026</a:t>
             </a:fld>
             <a:endParaRPr lang="pt-BR"/>
           </a:p>
@@ -6145,7 +6145,7 @@
           <a:p>
             <a:fld id="{A87E3B6E-8316-4A1C-BADA-DB7F3456EEF1}" type="datetimeFigureOut">
               <a:rPr lang="pt-BR" smtClean="0"/>
-              <a:t>22/08/2026</a:t>
+              <a:t>23/08/2026</a:t>
             </a:fld>
             <a:endParaRPr lang="pt-BR"/>
           </a:p>
@@ -6433,7 +6433,7 @@
           <a:p>
             <a:fld id="{A87E3B6E-8316-4A1C-BADA-DB7F3456EEF1}" type="datetimeFigureOut">
               <a:rPr lang="pt-BR" smtClean="0"/>
-              <a:t>22/08/2026</a:t>
+              <a:t>23/08/2026</a:t>
             </a:fld>
             <a:endParaRPr lang="pt-BR"/>
           </a:p>
@@ -6674,7 +6674,7 @@
           <a:p>
             <a:fld id="{A87E3B6E-8316-4A1C-BADA-DB7F3456EEF1}" type="datetimeFigureOut">
               <a:rPr lang="pt-BR" smtClean="0"/>
-              <a:t>22/08/2026</a:t>
+              <a:t>23/08/2026</a:t>
             </a:fld>
             <a:endParaRPr lang="pt-BR"/>
           </a:p>
@@ -7238,7 +7238,7 @@
           <a:p>
             <a:fld id="{A87E3B6E-8316-4A1C-BADA-DB7F3456EEF1}" type="datetimeFigureOut">
               <a:rPr lang="pt-BR" smtClean="0"/>
-              <a:t>22/08/2026</a:t>
+              <a:t>23/08/2026</a:t>
             </a:fld>
             <a:endParaRPr lang="pt-BR"/>
           </a:p>
@@ -7729,20 +7729,12 @@
           <a:lstStyle/>
           <a:p>
             <a:r>
-              <a:rPr lang="pt-BR">
-                <a:solidFill>
-                  <a:schemeClr val="bg1"/>
-                </a:solidFill>
-              </a:rPr>
-              <a:t>módulo 6 </a:t>
-            </a:r>
-            <a:r>
               <a:rPr lang="pt-BR" dirty="0">
                 <a:solidFill>
                   <a:schemeClr val="bg1"/>
                 </a:solidFill>
               </a:rPr>
-              <a:t>– Argumentos e inferência</a:t>
+              <a:t>módulo 6 – Argumentos e inferência</a:t>
             </a:r>
           </a:p>
         </p:txBody>
@@ -8731,8 +8723,8 @@
           </a:p>
         </p:txBody>
       </p:sp>
-      <mc:AlternateContent xmlns:mc="http://schemas.openxmlformats.org/markup-compatibility/2006" xmlns:a14="http://schemas.microsoft.com/office/drawing/2010/main">
-        <mc:Choice Requires="a14">
+      <mc:AlternateContent xmlns:mc="http://schemas.openxmlformats.org/markup-compatibility/2006">
+        <mc:Choice xmlns:a14="http://schemas.microsoft.com/office/drawing/2010/main" Requires="a14">
           <p:sp>
             <p:nvSpPr>
               <p:cNvPr id="6" name="Espaço Reservado para Conteúdo 5">
@@ -8751,8 +8743,8 @@
             </p:nvSpPr>
             <p:spPr>
               <a:xfrm>
-                <a:off x="1202370" y="1589314"/>
-                <a:ext cx="5209316" cy="5268685"/>
+                <a:off x="1202370" y="1556658"/>
+                <a:ext cx="5873344" cy="5301342"/>
               </a:xfrm>
             </p:spPr>
             <p:txBody>
@@ -8771,6 +8763,70 @@
                 <a:pPr marL="457200" lvl="1" indent="0" algn="just">
                   <a:buNone/>
                 </a:pPr>
+                <a:endParaRPr lang="pt-BR" i="1" dirty="0">
+                  <a:latin typeface="Cambria Math" panose="02040503050406030204" pitchFamily="18" charset="0"/>
+                </a:endParaRPr>
+              </a:p>
+              <a:p>
+                <a:pPr marL="457200" lvl="1" indent="0" algn="just">
+                  <a:buNone/>
+                </a:pPr>
+                <a14:m>
+                  <m:oMathPara xmlns:m="http://schemas.openxmlformats.org/officeDocument/2006/math">
+                    <m:oMathParaPr>
+                      <m:jc m:val="centerGroup"/>
+                    </m:oMathParaPr>
+                    <m:oMath xmlns:m="http://schemas.openxmlformats.org/officeDocument/2006/math">
+                      <m:r>
+                        <a:rPr lang="pt-BR" i="1" dirty="0">
+                          <a:latin typeface="Cambria Math" panose="02040503050406030204" pitchFamily="18" charset="0"/>
+                        </a:rPr>
+                        <m:t>𝑃𝑟𝑒𝑚𝑖𝑠𝑠𝑎</m:t>
+                      </m:r>
+                      <m:r>
+                        <a:rPr lang="pt-BR" i="1" dirty="0">
+                          <a:latin typeface="Cambria Math" panose="02040503050406030204" pitchFamily="18" charset="0"/>
+                        </a:rPr>
+                        <m:t> </m:t>
+                      </m:r>
+                      <m:r>
+                        <a:rPr lang="pt-BR" b="0" i="1" dirty="0" smtClean="0">
+                          <a:latin typeface="Cambria Math" panose="02040503050406030204" pitchFamily="18" charset="0"/>
+                        </a:rPr>
+                        <m:t>1</m:t>
+                      </m:r>
+                    </m:oMath>
+                  </m:oMathPara>
+                </a14:m>
+                <a:endParaRPr lang="pt-BR" b="0" i="1" dirty="0">
+                  <a:latin typeface="Cambria Math" panose="02040503050406030204" pitchFamily="18" charset="0"/>
+                </a:endParaRPr>
+              </a:p>
+              <a:p>
+                <a:pPr marL="457200" lvl="1" indent="0" algn="just">
+                  <a:buNone/>
+                </a:pPr>
+                <a14:m>
+                  <m:oMathPara xmlns:m="http://schemas.openxmlformats.org/officeDocument/2006/math">
+                    <m:oMathParaPr>
+                      <m:jc m:val="centerGroup"/>
+                    </m:oMathParaPr>
+                    <m:oMath xmlns:m="http://schemas.openxmlformats.org/officeDocument/2006/math">
+                      <m:r>
+                        <a:rPr lang="pt-BR" i="1" dirty="0">
+                          <a:latin typeface="Cambria Math" panose="02040503050406030204" pitchFamily="18" charset="0"/>
+                        </a:rPr>
+                        <m:t>𝑃𝑟𝑒𝑚𝑖𝑠𝑠𝑎</m:t>
+                      </m:r>
+                      <m:r>
+                        <a:rPr lang="pt-BR" i="1" dirty="0">
+                          <a:latin typeface="Cambria Math" panose="02040503050406030204" pitchFamily="18" charset="0"/>
+                        </a:rPr>
+                        <m:t> 2</m:t>
+                      </m:r>
+                    </m:oMath>
+                  </m:oMathPara>
+                </a14:m>
                 <a:endParaRPr lang="pt-BR" b="1" dirty="0"/>
               </a:p>
               <a:p>
@@ -8813,45 +8869,9 @@
                         </a:rPr>
                         <m:t>…</m:t>
                       </m:r>
-                      <m:r>
-                        <a:rPr lang="pt-BR" i="1" dirty="0" smtClean="0">
-                          <a:latin typeface="Cambria Math" panose="02040503050406030204" pitchFamily="18" charset="0"/>
-                        </a:rPr>
-                        <m:t>𝑃𝑟𝑒𝑚𝑖𝑠𝑠𝑎</m:t>
-                      </m:r>
-                      <m:r>
-                        <a:rPr lang="pt-BR" i="1" dirty="0">
-                          <a:latin typeface="Cambria Math" panose="02040503050406030204" pitchFamily="18" charset="0"/>
-                        </a:rPr>
-                        <m:t> </m:t>
-                      </m:r>
-                      <m:r>
-                        <a:rPr lang="pt-BR" i="1" dirty="0" smtClean="0">
-                          <a:latin typeface="Cambria Math" panose="02040503050406030204" pitchFamily="18" charset="0"/>
-                        </a:rPr>
-                        <m:t>2</m:t>
-                      </m:r>
-                      <m:r>
-                        <a:rPr lang="pt-BR" i="1" dirty="0" smtClean="0">
-                          <a:latin typeface="Cambria Math" panose="02040503050406030204" pitchFamily="18" charset="0"/>
-                        </a:rPr>
-                        <m:t>𝑃𝑟𝑒𝑚𝑖𝑠𝑠𝑎</m:t>
-                      </m:r>
-                      <m:r>
-                        <a:rPr lang="pt-BR" i="1" dirty="0" smtClean="0">
-                          <a:latin typeface="Cambria Math" panose="02040503050406030204" pitchFamily="18" charset="0"/>
-                        </a:rPr>
-                        <m:t> 1</m:t>
-                      </m:r>
                     </m:oMath>
                   </m:oMathPara>
                 </a14:m>
-                <a:endParaRPr lang="pt-BR" b="1" dirty="0"/>
-              </a:p>
-              <a:p>
-                <a:pPr marL="457200" lvl="1" indent="0" algn="just">
-                  <a:buNone/>
-                </a:pPr>
                 <a:endParaRPr lang="pt-BR" b="1" dirty="0"/>
               </a:p>
               <a:p>
@@ -8951,14 +8971,8 @@
                 </a:pPr>
                 <a:r>
                   <a:rPr lang="pt-BR" sz="2000" dirty="0"/>
-                  <a:t>Portanto, a rua está molhada.</a:t>
+                  <a:t>Portanto, a rua está molhada. </a:t>
                 </a:r>
-              </a:p>
-              <a:p>
-                <a:pPr lvl="1" algn="just">
-                  <a:buFont typeface="Courier New" panose="02070309020205020404" pitchFamily="49" charset="0"/>
-                  <a:buChar char="o"/>
-                </a:pPr>
                 <a14:m>
                   <m:oMath xmlns:m="http://schemas.openxmlformats.org/officeDocument/2006/math">
                     <m:r>
@@ -8971,7 +8985,7 @@
                       <a:rPr lang="pt-BR" sz="2000" i="1" dirty="0" smtClean="0">
                         <a:latin typeface="Cambria Math" panose="02040503050406030204" pitchFamily="18" charset="0"/>
                       </a:rPr>
-                      <m:t>  </m:t>
+                      <m:t> → </m:t>
                     </m:r>
                     <m:r>
                       <a:rPr lang="pt-BR" sz="2000" i="1" dirty="0" smtClean="0">
@@ -9013,7 +9027,7 @@
             </p:txBody>
           </p:sp>
         </mc:Choice>
-        <mc:Fallback xmlns="">
+        <mc:Fallback>
           <p:sp>
             <p:nvSpPr>
               <p:cNvPr id="6" name="Espaço Reservado para Conteúdo 5">
@@ -9032,13 +9046,13 @@
             </p:nvSpPr>
             <p:spPr>
               <a:xfrm>
-                <a:off x="1202370" y="1589314"/>
-                <a:ext cx="5209316" cy="5268685"/>
+                <a:off x="1202370" y="1556658"/>
+                <a:ext cx="5873344" cy="5301342"/>
               </a:xfrm>
               <a:blipFill>
                 <a:blip r:embed="rId3"/>
                 <a:stretch>
-                  <a:fillRect l="-1520" t="-1620"/>
+                  <a:fillRect l="-1349" t="-1609"/>
                 </a:stretch>
               </a:blipFill>
             </p:spPr>
@@ -9066,13 +9080,15 @@
               </a:ext>
             </a:extLst>
           </p:cNvPr>
-          <p:cNvCxnSpPr/>
+          <p:cNvCxnSpPr>
+            <a:cxnSpLocks/>
+          </p:cNvCxnSpPr>
           <p:nvPr/>
         </p:nvCxnSpPr>
         <p:spPr>
           <a:xfrm>
-            <a:off x="4702629" y="2394857"/>
-            <a:ext cx="0" cy="1959429"/>
+            <a:off x="3733800" y="3320143"/>
+            <a:ext cx="0" cy="990600"/>
           </a:xfrm>
           <a:prstGeom prst="straightConnector1">
             <a:avLst/>
